--- a/report/project_report_Ellinger_Matthias1.pptx
+++ b/report/project_report_Ellinger_Matthias1.pptx
@@ -3352,7 +3352,7 @@
         <p:spPr>
           <a:xfrm>
             <a:off x="381549" y="618373"/>
-            <a:ext cx="1848536" cy="559165"/>
+            <a:ext cx="1809201" cy="454777"/>
           </a:xfrm>
           <a:prstGeom prst="roundRect">
             <a:avLst/>
@@ -3386,7 +3386,7 @@
           <a:p>
             <a:pPr algn="ctr"/>
             <a:r>
-              <a:rPr lang="en-US" dirty="0">
+              <a:rPr lang="en-US" sz="1400" dirty="0">
                 <a:solidFill>
                   <a:srgbClr val="1B0719"/>
                 </a:solidFill>
@@ -3396,6 +3396,1275 @@
           </a:p>
         </p:txBody>
       </p:sp>
+      <p:sp>
+        <p:nvSpPr>
+          <p:cNvPr id="3" name="Rectangle: Rounded Corners 2">
+            <a:extLst>
+              <a:ext uri="{FF2B5EF4-FFF2-40B4-BE49-F238E27FC236}">
+                <a16:creationId xmlns:a16="http://schemas.microsoft.com/office/drawing/2014/main" id="{9326E706-49F8-C3E7-1DAD-80C7F81F2085}"/>
+              </a:ext>
+            </a:extLst>
+          </p:cNvPr>
+          <p:cNvSpPr/>
+          <p:nvPr/>
+        </p:nvSpPr>
+        <p:spPr>
+          <a:xfrm>
+            <a:off x="3083474" y="618371"/>
+            <a:ext cx="1809201" cy="454777"/>
+          </a:xfrm>
+          <a:prstGeom prst="roundRect">
+            <a:avLst/>
+          </a:prstGeom>
+          <a:noFill/>
+          <a:ln w="28575">
+            <a:solidFill>
+              <a:srgbClr val="1B0719"/>
+            </a:solidFill>
+          </a:ln>
+        </p:spPr>
+        <p:style>
+          <a:lnRef idx="2">
+            <a:schemeClr val="accent1">
+              <a:shade val="15000"/>
+            </a:schemeClr>
+          </a:lnRef>
+          <a:fillRef idx="1">
+            <a:schemeClr val="accent1"/>
+          </a:fillRef>
+          <a:effectRef idx="0">
+            <a:schemeClr val="accent1"/>
+          </a:effectRef>
+          <a:fontRef idx="minor">
+            <a:schemeClr val="lt1"/>
+          </a:fontRef>
+        </p:style>
+        <p:txBody>
+          <a:bodyPr rtlCol="0" anchor="ctr"/>
+          <a:lstStyle/>
+          <a:p>
+            <a:pPr algn="ctr"/>
+            <a:r>
+              <a:rPr lang="en-US" sz="1400" dirty="0">
+                <a:solidFill>
+                  <a:srgbClr val="1B0719"/>
+                </a:solidFill>
+              </a:rPr>
+              <a:t>Start timers</a:t>
+            </a:r>
+          </a:p>
+        </p:txBody>
+      </p:sp>
+      <p:sp>
+        <p:nvSpPr>
+          <p:cNvPr id="6" name="Rectangle: Rounded Corners 5">
+            <a:extLst>
+              <a:ext uri="{FF2B5EF4-FFF2-40B4-BE49-F238E27FC236}">
+                <a16:creationId xmlns:a16="http://schemas.microsoft.com/office/drawing/2014/main" id="{62915E4A-DB70-591D-CCD5-9B2B8D1DF1F3}"/>
+              </a:ext>
+            </a:extLst>
+          </p:cNvPr>
+          <p:cNvSpPr/>
+          <p:nvPr/>
+        </p:nvSpPr>
+        <p:spPr>
+          <a:xfrm>
+            <a:off x="5798099" y="618371"/>
+            <a:ext cx="1809201" cy="454777"/>
+          </a:xfrm>
+          <a:prstGeom prst="roundRect">
+            <a:avLst/>
+          </a:prstGeom>
+          <a:noFill/>
+          <a:ln w="28575">
+            <a:solidFill>
+              <a:srgbClr val="1B0719"/>
+            </a:solidFill>
+          </a:ln>
+        </p:spPr>
+        <p:style>
+          <a:lnRef idx="2">
+            <a:schemeClr val="accent1">
+              <a:shade val="15000"/>
+            </a:schemeClr>
+          </a:lnRef>
+          <a:fillRef idx="1">
+            <a:schemeClr val="accent1"/>
+          </a:fillRef>
+          <a:effectRef idx="0">
+            <a:schemeClr val="accent1"/>
+          </a:effectRef>
+          <a:fontRef idx="minor">
+            <a:schemeClr val="lt1"/>
+          </a:fontRef>
+        </p:style>
+        <p:txBody>
+          <a:bodyPr rtlCol="0" anchor="ctr"/>
+          <a:lstStyle/>
+          <a:p>
+            <a:pPr algn="ctr"/>
+            <a:r>
+              <a:rPr lang="en-US" sz="1400" dirty="0">
+                <a:solidFill>
+                  <a:srgbClr val="1B0719"/>
+                </a:solidFill>
+              </a:rPr>
+              <a:t>While loop</a:t>
+            </a:r>
+          </a:p>
+        </p:txBody>
+      </p:sp>
+      <p:sp>
+        <p:nvSpPr>
+          <p:cNvPr id="7" name="Rectangle: Rounded Corners 6">
+            <a:extLst>
+              <a:ext uri="{FF2B5EF4-FFF2-40B4-BE49-F238E27FC236}">
+                <a16:creationId xmlns:a16="http://schemas.microsoft.com/office/drawing/2014/main" id="{130A3D19-7DE8-7BFC-5E73-7863A9BC3B62}"/>
+              </a:ext>
+            </a:extLst>
+          </p:cNvPr>
+          <p:cNvSpPr/>
+          <p:nvPr/>
+        </p:nvSpPr>
+        <p:spPr>
+          <a:xfrm>
+            <a:off x="381549" y="1678823"/>
+            <a:ext cx="1809202" cy="454777"/>
+          </a:xfrm>
+          <a:prstGeom prst="roundRect">
+            <a:avLst/>
+          </a:prstGeom>
+          <a:noFill/>
+          <a:ln w="28575">
+            <a:solidFill>
+              <a:srgbClr val="1B0719"/>
+            </a:solidFill>
+          </a:ln>
+        </p:spPr>
+        <p:style>
+          <a:lnRef idx="2">
+            <a:schemeClr val="accent1">
+              <a:shade val="15000"/>
+            </a:schemeClr>
+          </a:lnRef>
+          <a:fillRef idx="1">
+            <a:schemeClr val="accent1"/>
+          </a:fillRef>
+          <a:effectRef idx="0">
+            <a:schemeClr val="accent1"/>
+          </a:effectRef>
+          <a:fontRef idx="minor">
+            <a:schemeClr val="lt1"/>
+          </a:fontRef>
+        </p:style>
+        <p:txBody>
+          <a:bodyPr rtlCol="0" anchor="ctr"/>
+          <a:lstStyle/>
+          <a:p>
+            <a:pPr algn="ctr"/>
+            <a:r>
+              <a:rPr lang="en-US" sz="1400" dirty="0">
+                <a:solidFill>
+                  <a:srgbClr val="1B0719"/>
+                </a:solidFill>
+              </a:rPr>
+              <a:t>IR remote interrupt</a:t>
+            </a:r>
+          </a:p>
+        </p:txBody>
+      </p:sp>
+      <p:sp>
+        <p:nvSpPr>
+          <p:cNvPr id="8" name="Rectangle: Rounded Corners 7">
+            <a:extLst>
+              <a:ext uri="{FF2B5EF4-FFF2-40B4-BE49-F238E27FC236}">
+                <a16:creationId xmlns:a16="http://schemas.microsoft.com/office/drawing/2014/main" id="{264D719F-C7A6-2EE1-899F-DA33CE7BB938}"/>
+              </a:ext>
+            </a:extLst>
+          </p:cNvPr>
+          <p:cNvSpPr/>
+          <p:nvPr/>
+        </p:nvSpPr>
+        <p:spPr>
+          <a:xfrm>
+            <a:off x="3083474" y="1678823"/>
+            <a:ext cx="1809202" cy="454777"/>
+          </a:xfrm>
+          <a:prstGeom prst="roundRect">
+            <a:avLst/>
+          </a:prstGeom>
+          <a:noFill/>
+          <a:ln w="28575">
+            <a:solidFill>
+              <a:srgbClr val="1B0719"/>
+            </a:solidFill>
+          </a:ln>
+        </p:spPr>
+        <p:style>
+          <a:lnRef idx="2">
+            <a:schemeClr val="accent1">
+              <a:shade val="15000"/>
+            </a:schemeClr>
+          </a:lnRef>
+          <a:fillRef idx="1">
+            <a:schemeClr val="accent1"/>
+          </a:fillRef>
+          <a:effectRef idx="0">
+            <a:schemeClr val="accent1"/>
+          </a:effectRef>
+          <a:fontRef idx="minor">
+            <a:schemeClr val="lt1"/>
+          </a:fontRef>
+        </p:style>
+        <p:txBody>
+          <a:bodyPr rtlCol="0" anchor="ctr"/>
+          <a:lstStyle/>
+          <a:p>
+            <a:pPr algn="ctr"/>
+            <a:r>
+              <a:rPr lang="en-US" sz="1400" dirty="0">
+                <a:solidFill>
+                  <a:srgbClr val="1B0719"/>
+                </a:solidFill>
+              </a:rPr>
+              <a:t>Set flags for remote control</a:t>
+            </a:r>
+          </a:p>
+        </p:txBody>
+      </p:sp>
+      <p:sp>
+        <p:nvSpPr>
+          <p:cNvPr id="9" name="Rectangle: Rounded Corners 8">
+            <a:extLst>
+              <a:ext uri="{FF2B5EF4-FFF2-40B4-BE49-F238E27FC236}">
+                <a16:creationId xmlns:a16="http://schemas.microsoft.com/office/drawing/2014/main" id="{C41BCBDE-00BC-70B1-379A-A87FCD36CFF9}"/>
+              </a:ext>
+            </a:extLst>
+          </p:cNvPr>
+          <p:cNvSpPr/>
+          <p:nvPr/>
+        </p:nvSpPr>
+        <p:spPr>
+          <a:xfrm>
+            <a:off x="6820177" y="1648913"/>
+            <a:ext cx="1809202" cy="454777"/>
+          </a:xfrm>
+          <a:prstGeom prst="roundRect">
+            <a:avLst/>
+          </a:prstGeom>
+          <a:noFill/>
+          <a:ln w="28575">
+            <a:solidFill>
+              <a:srgbClr val="1B0719"/>
+            </a:solidFill>
+          </a:ln>
+        </p:spPr>
+        <p:style>
+          <a:lnRef idx="2">
+            <a:schemeClr val="accent1">
+              <a:shade val="15000"/>
+            </a:schemeClr>
+          </a:lnRef>
+          <a:fillRef idx="1">
+            <a:schemeClr val="accent1"/>
+          </a:fillRef>
+          <a:effectRef idx="0">
+            <a:schemeClr val="accent1"/>
+          </a:effectRef>
+          <a:fontRef idx="minor">
+            <a:schemeClr val="lt1"/>
+          </a:fontRef>
+        </p:style>
+        <p:txBody>
+          <a:bodyPr rtlCol="0" anchor="ctr"/>
+          <a:lstStyle/>
+          <a:p>
+            <a:pPr algn="ctr"/>
+            <a:r>
+              <a:rPr lang="en-US" sz="1400" dirty="0">
+                <a:solidFill>
+                  <a:srgbClr val="1B0719"/>
+                </a:solidFill>
+              </a:rPr>
+              <a:t>Check remote control flags</a:t>
+            </a:r>
+          </a:p>
+        </p:txBody>
+      </p:sp>
+      <p:sp>
+        <p:nvSpPr>
+          <p:cNvPr id="13" name="Rectangle: Rounded Corners 12">
+            <a:extLst>
+              <a:ext uri="{FF2B5EF4-FFF2-40B4-BE49-F238E27FC236}">
+                <a16:creationId xmlns:a16="http://schemas.microsoft.com/office/drawing/2014/main" id="{02D93D08-83B7-A8DE-38B3-41023BA71A10}"/>
+              </a:ext>
+            </a:extLst>
+          </p:cNvPr>
+          <p:cNvSpPr/>
+          <p:nvPr/>
+        </p:nvSpPr>
+        <p:spPr>
+          <a:xfrm>
+            <a:off x="381549" y="3058277"/>
+            <a:ext cx="1809202" cy="454777"/>
+          </a:xfrm>
+          <a:prstGeom prst="roundRect">
+            <a:avLst/>
+          </a:prstGeom>
+          <a:noFill/>
+          <a:ln w="28575">
+            <a:solidFill>
+              <a:srgbClr val="1B0719"/>
+            </a:solidFill>
+          </a:ln>
+        </p:spPr>
+        <p:style>
+          <a:lnRef idx="2">
+            <a:schemeClr val="accent1">
+              <a:shade val="15000"/>
+            </a:schemeClr>
+          </a:lnRef>
+          <a:fillRef idx="1">
+            <a:schemeClr val="accent1"/>
+          </a:fillRef>
+          <a:effectRef idx="0">
+            <a:schemeClr val="accent1"/>
+          </a:effectRef>
+          <a:fontRef idx="minor">
+            <a:schemeClr val="lt1"/>
+          </a:fontRef>
+        </p:style>
+        <p:txBody>
+          <a:bodyPr rtlCol="0" anchor="ctr"/>
+          <a:lstStyle/>
+          <a:p>
+            <a:pPr algn="ctr"/>
+            <a:r>
+              <a:rPr lang="en-US" sz="1400" dirty="0">
+                <a:solidFill>
+                  <a:srgbClr val="1B0719"/>
+                </a:solidFill>
+              </a:rPr>
+              <a:t>Timer interrupt</a:t>
+            </a:r>
+          </a:p>
+        </p:txBody>
+      </p:sp>
+      <p:sp>
+        <p:nvSpPr>
+          <p:cNvPr id="14" name="Rectangle: Rounded Corners 13">
+            <a:extLst>
+              <a:ext uri="{FF2B5EF4-FFF2-40B4-BE49-F238E27FC236}">
+                <a16:creationId xmlns:a16="http://schemas.microsoft.com/office/drawing/2014/main" id="{30D8B166-A98A-2C4A-F9E8-D638FFAEF99C}"/>
+              </a:ext>
+            </a:extLst>
+          </p:cNvPr>
+          <p:cNvSpPr/>
+          <p:nvPr/>
+        </p:nvSpPr>
+        <p:spPr>
+          <a:xfrm>
+            <a:off x="3083474" y="3058277"/>
+            <a:ext cx="1809202" cy="454777"/>
+          </a:xfrm>
+          <a:prstGeom prst="roundRect">
+            <a:avLst/>
+          </a:prstGeom>
+          <a:noFill/>
+          <a:ln w="28575">
+            <a:solidFill>
+              <a:srgbClr val="1B0719"/>
+            </a:solidFill>
+          </a:ln>
+        </p:spPr>
+        <p:style>
+          <a:lnRef idx="2">
+            <a:schemeClr val="accent1">
+              <a:shade val="15000"/>
+            </a:schemeClr>
+          </a:lnRef>
+          <a:fillRef idx="1">
+            <a:schemeClr val="accent1"/>
+          </a:fillRef>
+          <a:effectRef idx="0">
+            <a:schemeClr val="accent1"/>
+          </a:effectRef>
+          <a:fontRef idx="minor">
+            <a:schemeClr val="lt1"/>
+          </a:fontRef>
+        </p:style>
+        <p:txBody>
+          <a:bodyPr rtlCol="0" anchor="ctr"/>
+          <a:lstStyle/>
+          <a:p>
+            <a:pPr algn="ctr"/>
+            <a:r>
+              <a:rPr lang="en-US" sz="1400" dirty="0">
+                <a:solidFill>
+                  <a:srgbClr val="1B0719"/>
+                </a:solidFill>
+              </a:rPr>
+              <a:t>Set flags for getting data</a:t>
+            </a:r>
+          </a:p>
+        </p:txBody>
+      </p:sp>
+      <p:sp>
+        <p:nvSpPr>
+          <p:cNvPr id="15" name="Rectangle: Rounded Corners 14">
+            <a:extLst>
+              <a:ext uri="{FF2B5EF4-FFF2-40B4-BE49-F238E27FC236}">
+                <a16:creationId xmlns:a16="http://schemas.microsoft.com/office/drawing/2014/main" id="{8A9E08BC-A4A5-0668-439F-2D471501605E}"/>
+              </a:ext>
+            </a:extLst>
+          </p:cNvPr>
+          <p:cNvSpPr/>
+          <p:nvPr/>
+        </p:nvSpPr>
+        <p:spPr>
+          <a:xfrm>
+            <a:off x="6820177" y="3028367"/>
+            <a:ext cx="1809202" cy="454777"/>
+          </a:xfrm>
+          <a:prstGeom prst="roundRect">
+            <a:avLst/>
+          </a:prstGeom>
+          <a:noFill/>
+          <a:ln w="28575">
+            <a:solidFill>
+              <a:srgbClr val="1B0719"/>
+            </a:solidFill>
+          </a:ln>
+        </p:spPr>
+        <p:style>
+          <a:lnRef idx="2">
+            <a:schemeClr val="accent1">
+              <a:shade val="15000"/>
+            </a:schemeClr>
+          </a:lnRef>
+          <a:fillRef idx="1">
+            <a:schemeClr val="accent1"/>
+          </a:fillRef>
+          <a:effectRef idx="0">
+            <a:schemeClr val="accent1"/>
+          </a:effectRef>
+          <a:fontRef idx="minor">
+            <a:schemeClr val="lt1"/>
+          </a:fontRef>
+        </p:style>
+        <p:txBody>
+          <a:bodyPr rtlCol="0" anchor="ctr"/>
+          <a:lstStyle/>
+          <a:p>
+            <a:pPr algn="ctr"/>
+            <a:r>
+              <a:rPr lang="en-US" sz="1400" dirty="0">
+                <a:solidFill>
+                  <a:srgbClr val="1B0719"/>
+                </a:solidFill>
+              </a:rPr>
+              <a:t>Check get data flag</a:t>
+            </a:r>
+          </a:p>
+        </p:txBody>
+      </p:sp>
+      <p:sp>
+        <p:nvSpPr>
+          <p:cNvPr id="16" name="Rectangle: Rounded Corners 15">
+            <a:extLst>
+              <a:ext uri="{FF2B5EF4-FFF2-40B4-BE49-F238E27FC236}">
+                <a16:creationId xmlns:a16="http://schemas.microsoft.com/office/drawing/2014/main" id="{8170788C-16A0-AB44-37A1-79449F9CFEC9}"/>
+              </a:ext>
+            </a:extLst>
+          </p:cNvPr>
+          <p:cNvSpPr/>
+          <p:nvPr/>
+        </p:nvSpPr>
+        <p:spPr>
+          <a:xfrm>
+            <a:off x="7724778" y="3718094"/>
+            <a:ext cx="1809202" cy="454777"/>
+          </a:xfrm>
+          <a:prstGeom prst="roundRect">
+            <a:avLst/>
+          </a:prstGeom>
+          <a:noFill/>
+          <a:ln w="28575">
+            <a:solidFill>
+              <a:srgbClr val="1B0719"/>
+            </a:solidFill>
+          </a:ln>
+        </p:spPr>
+        <p:style>
+          <a:lnRef idx="2">
+            <a:schemeClr val="accent1">
+              <a:shade val="15000"/>
+            </a:schemeClr>
+          </a:lnRef>
+          <a:fillRef idx="1">
+            <a:schemeClr val="accent1"/>
+          </a:fillRef>
+          <a:effectRef idx="0">
+            <a:schemeClr val="accent1"/>
+          </a:effectRef>
+          <a:fontRef idx="minor">
+            <a:schemeClr val="lt1"/>
+          </a:fontRef>
+        </p:style>
+        <p:txBody>
+          <a:bodyPr rtlCol="0" anchor="ctr"/>
+          <a:lstStyle/>
+          <a:p>
+            <a:pPr algn="ctr"/>
+            <a:r>
+              <a:rPr lang="en-US" sz="1400" dirty="0">
+                <a:solidFill>
+                  <a:srgbClr val="1B0719"/>
+                </a:solidFill>
+              </a:rPr>
+              <a:t>Get data</a:t>
+            </a:r>
+          </a:p>
+        </p:txBody>
+      </p:sp>
+      <p:sp>
+        <p:nvSpPr>
+          <p:cNvPr id="17" name="Rectangle: Rounded Corners 16">
+            <a:extLst>
+              <a:ext uri="{FF2B5EF4-FFF2-40B4-BE49-F238E27FC236}">
+                <a16:creationId xmlns:a16="http://schemas.microsoft.com/office/drawing/2014/main" id="{37EF421D-09DC-52A4-565A-634080163EF8}"/>
+              </a:ext>
+            </a:extLst>
+          </p:cNvPr>
+          <p:cNvSpPr/>
+          <p:nvPr/>
+        </p:nvSpPr>
+        <p:spPr>
+          <a:xfrm>
+            <a:off x="7724778" y="4407821"/>
+            <a:ext cx="1809202" cy="454777"/>
+          </a:xfrm>
+          <a:prstGeom prst="roundRect">
+            <a:avLst/>
+          </a:prstGeom>
+          <a:noFill/>
+          <a:ln w="28575">
+            <a:solidFill>
+              <a:srgbClr val="1B0719"/>
+            </a:solidFill>
+          </a:ln>
+        </p:spPr>
+        <p:style>
+          <a:lnRef idx="2">
+            <a:schemeClr val="accent1">
+              <a:shade val="15000"/>
+            </a:schemeClr>
+          </a:lnRef>
+          <a:fillRef idx="1">
+            <a:schemeClr val="accent1"/>
+          </a:fillRef>
+          <a:effectRef idx="0">
+            <a:schemeClr val="accent1"/>
+          </a:effectRef>
+          <a:fontRef idx="minor">
+            <a:schemeClr val="lt1"/>
+          </a:fontRef>
+        </p:style>
+        <p:txBody>
+          <a:bodyPr rtlCol="0" anchor="ctr"/>
+          <a:lstStyle/>
+          <a:p>
+            <a:pPr algn="ctr"/>
+            <a:r>
+              <a:rPr lang="en-US" sz="1400" dirty="0">
+                <a:solidFill>
+                  <a:srgbClr val="1B0719"/>
+                </a:solidFill>
+              </a:rPr>
+              <a:t>Process data</a:t>
+            </a:r>
+          </a:p>
+        </p:txBody>
+      </p:sp>
+      <p:sp>
+        <p:nvSpPr>
+          <p:cNvPr id="18" name="Rectangle: Rounded Corners 17">
+            <a:extLst>
+              <a:ext uri="{FF2B5EF4-FFF2-40B4-BE49-F238E27FC236}">
+                <a16:creationId xmlns:a16="http://schemas.microsoft.com/office/drawing/2014/main" id="{81000AAF-CE6A-E4E9-A993-DC52F563103A}"/>
+              </a:ext>
+            </a:extLst>
+          </p:cNvPr>
+          <p:cNvSpPr/>
+          <p:nvPr/>
+        </p:nvSpPr>
+        <p:spPr>
+          <a:xfrm>
+            <a:off x="7724778" y="5097548"/>
+            <a:ext cx="1809202" cy="454777"/>
+          </a:xfrm>
+          <a:prstGeom prst="roundRect">
+            <a:avLst/>
+          </a:prstGeom>
+          <a:noFill/>
+          <a:ln w="28575">
+            <a:solidFill>
+              <a:srgbClr val="1B0719"/>
+            </a:solidFill>
+          </a:ln>
+        </p:spPr>
+        <p:style>
+          <a:lnRef idx="2">
+            <a:schemeClr val="accent1">
+              <a:shade val="15000"/>
+            </a:schemeClr>
+          </a:lnRef>
+          <a:fillRef idx="1">
+            <a:schemeClr val="accent1"/>
+          </a:fillRef>
+          <a:effectRef idx="0">
+            <a:schemeClr val="accent1"/>
+          </a:effectRef>
+          <a:fontRef idx="minor">
+            <a:schemeClr val="lt1"/>
+          </a:fontRef>
+        </p:style>
+        <p:txBody>
+          <a:bodyPr rtlCol="0" anchor="ctr"/>
+          <a:lstStyle/>
+          <a:p>
+            <a:pPr algn="ctr"/>
+            <a:r>
+              <a:rPr lang="en-US" sz="1400" dirty="0">
+                <a:solidFill>
+                  <a:srgbClr val="1B0719"/>
+                </a:solidFill>
+              </a:rPr>
+              <a:t>Run PID loop</a:t>
+            </a:r>
+          </a:p>
+        </p:txBody>
+      </p:sp>
+      <p:sp>
+        <p:nvSpPr>
+          <p:cNvPr id="19" name="Rectangle: Rounded Corners 18">
+            <a:extLst>
+              <a:ext uri="{FF2B5EF4-FFF2-40B4-BE49-F238E27FC236}">
+                <a16:creationId xmlns:a16="http://schemas.microsoft.com/office/drawing/2014/main" id="{0C005908-6D12-CC9B-B75C-9D19EB4B6F2E}"/>
+              </a:ext>
+            </a:extLst>
+          </p:cNvPr>
+          <p:cNvSpPr/>
+          <p:nvPr/>
+        </p:nvSpPr>
+        <p:spPr>
+          <a:xfrm>
+            <a:off x="7724778" y="5787275"/>
+            <a:ext cx="1809202" cy="454777"/>
+          </a:xfrm>
+          <a:prstGeom prst="roundRect">
+            <a:avLst/>
+          </a:prstGeom>
+          <a:noFill/>
+          <a:ln w="28575">
+            <a:solidFill>
+              <a:srgbClr val="1B0719"/>
+            </a:solidFill>
+          </a:ln>
+        </p:spPr>
+        <p:style>
+          <a:lnRef idx="2">
+            <a:schemeClr val="accent1">
+              <a:shade val="15000"/>
+            </a:schemeClr>
+          </a:lnRef>
+          <a:fillRef idx="1">
+            <a:schemeClr val="accent1"/>
+          </a:fillRef>
+          <a:effectRef idx="0">
+            <a:schemeClr val="accent1"/>
+          </a:effectRef>
+          <a:fontRef idx="minor">
+            <a:schemeClr val="lt1"/>
+          </a:fontRef>
+        </p:style>
+        <p:txBody>
+          <a:bodyPr rtlCol="0" anchor="ctr"/>
+          <a:lstStyle/>
+          <a:p>
+            <a:pPr algn="ctr"/>
+            <a:r>
+              <a:rPr lang="en-US" sz="1400" dirty="0">
+                <a:solidFill>
+                  <a:srgbClr val="1B0719"/>
+                </a:solidFill>
+              </a:rPr>
+              <a:t>Write out PWM to motors</a:t>
+            </a:r>
+          </a:p>
+        </p:txBody>
+      </p:sp>
+      <p:sp>
+        <p:nvSpPr>
+          <p:cNvPr id="20" name="Rectangle: Rounded Corners 19">
+            <a:extLst>
+              <a:ext uri="{FF2B5EF4-FFF2-40B4-BE49-F238E27FC236}">
+                <a16:creationId xmlns:a16="http://schemas.microsoft.com/office/drawing/2014/main" id="{2B24A24F-E709-C69B-99F8-5D0761182235}"/>
+              </a:ext>
+            </a:extLst>
+          </p:cNvPr>
+          <p:cNvSpPr/>
+          <p:nvPr/>
+        </p:nvSpPr>
+        <p:spPr>
+          <a:xfrm>
+            <a:off x="7724778" y="2338640"/>
+            <a:ext cx="1809202" cy="454777"/>
+          </a:xfrm>
+          <a:prstGeom prst="roundRect">
+            <a:avLst/>
+          </a:prstGeom>
+          <a:noFill/>
+          <a:ln w="28575">
+            <a:solidFill>
+              <a:srgbClr val="1B0719"/>
+            </a:solidFill>
+          </a:ln>
+        </p:spPr>
+        <p:style>
+          <a:lnRef idx="2">
+            <a:schemeClr val="accent1">
+              <a:shade val="15000"/>
+            </a:schemeClr>
+          </a:lnRef>
+          <a:fillRef idx="1">
+            <a:schemeClr val="accent1"/>
+          </a:fillRef>
+          <a:effectRef idx="0">
+            <a:schemeClr val="accent1"/>
+          </a:effectRef>
+          <a:fontRef idx="minor">
+            <a:schemeClr val="lt1"/>
+          </a:fontRef>
+        </p:style>
+        <p:txBody>
+          <a:bodyPr rtlCol="0" anchor="ctr"/>
+          <a:lstStyle/>
+          <a:p>
+            <a:pPr algn="ctr"/>
+            <a:r>
+              <a:rPr lang="en-US" sz="1400" dirty="0">
+                <a:solidFill>
+                  <a:srgbClr val="1B0719"/>
+                </a:solidFill>
+              </a:rPr>
+              <a:t>Apply action for specific flag</a:t>
+            </a:r>
+          </a:p>
+        </p:txBody>
+      </p:sp>
+      <p:cxnSp>
+        <p:nvCxnSpPr>
+          <p:cNvPr id="22" name="Straight Arrow Connector 21">
+            <a:extLst>
+              <a:ext uri="{FF2B5EF4-FFF2-40B4-BE49-F238E27FC236}">
+                <a16:creationId xmlns:a16="http://schemas.microsoft.com/office/drawing/2014/main" id="{F60A742E-8130-17C7-D97D-8B1F6AA188AE}"/>
+              </a:ext>
+            </a:extLst>
+          </p:cNvPr>
+          <p:cNvCxnSpPr>
+            <a:cxnSpLocks/>
+            <a:stCxn id="5" idx="3"/>
+            <a:endCxn id="3" idx="1"/>
+          </p:cNvCxnSpPr>
+          <p:nvPr/>
+        </p:nvCxnSpPr>
+        <p:spPr>
+          <a:xfrm flipV="1">
+            <a:off x="2190750" y="845760"/>
+            <a:ext cx="892724" cy="2"/>
+          </a:xfrm>
+          <a:prstGeom prst="straightConnector1">
+            <a:avLst/>
+          </a:prstGeom>
+          <a:ln>
+            <a:solidFill>
+              <a:srgbClr val="1B0719"/>
+            </a:solidFill>
+            <a:tailEnd type="triangle"/>
+          </a:ln>
+        </p:spPr>
+        <p:style>
+          <a:lnRef idx="2">
+            <a:schemeClr val="accent1"/>
+          </a:lnRef>
+          <a:fillRef idx="0">
+            <a:schemeClr val="accent1"/>
+          </a:fillRef>
+          <a:effectRef idx="1">
+            <a:schemeClr val="accent1"/>
+          </a:effectRef>
+          <a:fontRef idx="minor">
+            <a:schemeClr val="tx1"/>
+          </a:fontRef>
+        </p:style>
+      </p:cxnSp>
+      <p:cxnSp>
+        <p:nvCxnSpPr>
+          <p:cNvPr id="24" name="Straight Arrow Connector 23">
+            <a:extLst>
+              <a:ext uri="{FF2B5EF4-FFF2-40B4-BE49-F238E27FC236}">
+                <a16:creationId xmlns:a16="http://schemas.microsoft.com/office/drawing/2014/main" id="{4257DA76-5CC0-819B-3784-877BFB1A682E}"/>
+              </a:ext>
+            </a:extLst>
+          </p:cNvPr>
+          <p:cNvCxnSpPr>
+            <a:cxnSpLocks/>
+          </p:cNvCxnSpPr>
+          <p:nvPr/>
+        </p:nvCxnSpPr>
+        <p:spPr>
+          <a:xfrm flipV="1">
+            <a:off x="4892675" y="845759"/>
+            <a:ext cx="892724" cy="2"/>
+          </a:xfrm>
+          <a:prstGeom prst="straightConnector1">
+            <a:avLst/>
+          </a:prstGeom>
+          <a:ln>
+            <a:solidFill>
+              <a:srgbClr val="1B0719"/>
+            </a:solidFill>
+            <a:tailEnd type="triangle"/>
+          </a:ln>
+        </p:spPr>
+        <p:style>
+          <a:lnRef idx="2">
+            <a:schemeClr val="accent1"/>
+          </a:lnRef>
+          <a:fillRef idx="0">
+            <a:schemeClr val="accent1"/>
+          </a:fillRef>
+          <a:effectRef idx="1">
+            <a:schemeClr val="accent1"/>
+          </a:effectRef>
+          <a:fontRef idx="minor">
+            <a:schemeClr val="tx1"/>
+          </a:fontRef>
+        </p:style>
+      </p:cxnSp>
+      <p:cxnSp>
+        <p:nvCxnSpPr>
+          <p:cNvPr id="25" name="Straight Arrow Connector 24">
+            <a:extLst>
+              <a:ext uri="{FF2B5EF4-FFF2-40B4-BE49-F238E27FC236}">
+                <a16:creationId xmlns:a16="http://schemas.microsoft.com/office/drawing/2014/main" id="{9A411AC4-6B5A-77BB-6222-B1376DBDD3D2}"/>
+              </a:ext>
+            </a:extLst>
+          </p:cNvPr>
+          <p:cNvCxnSpPr>
+            <a:cxnSpLocks/>
+            <a:stCxn id="7" idx="3"/>
+            <a:endCxn id="8" idx="1"/>
+          </p:cNvCxnSpPr>
+          <p:nvPr/>
+        </p:nvCxnSpPr>
+        <p:spPr>
+          <a:xfrm>
+            <a:off x="2190751" y="1906212"/>
+            <a:ext cx="892723" cy="0"/>
+          </a:xfrm>
+          <a:prstGeom prst="straightConnector1">
+            <a:avLst/>
+          </a:prstGeom>
+          <a:ln>
+            <a:solidFill>
+              <a:srgbClr val="1B0719"/>
+            </a:solidFill>
+            <a:tailEnd type="triangle"/>
+          </a:ln>
+        </p:spPr>
+        <p:style>
+          <a:lnRef idx="2">
+            <a:schemeClr val="accent1"/>
+          </a:lnRef>
+          <a:fillRef idx="0">
+            <a:schemeClr val="accent1"/>
+          </a:fillRef>
+          <a:effectRef idx="1">
+            <a:schemeClr val="accent1"/>
+          </a:effectRef>
+          <a:fontRef idx="minor">
+            <a:schemeClr val="tx1"/>
+          </a:fontRef>
+        </p:style>
+      </p:cxnSp>
+      <p:cxnSp>
+        <p:nvCxnSpPr>
+          <p:cNvPr id="26" name="Straight Arrow Connector 25">
+            <a:extLst>
+              <a:ext uri="{FF2B5EF4-FFF2-40B4-BE49-F238E27FC236}">
+                <a16:creationId xmlns:a16="http://schemas.microsoft.com/office/drawing/2014/main" id="{25168235-30E0-7337-0554-4E1A6A0613D6}"/>
+              </a:ext>
+            </a:extLst>
+          </p:cNvPr>
+          <p:cNvCxnSpPr>
+            <a:cxnSpLocks/>
+            <a:stCxn id="13" idx="3"/>
+            <a:endCxn id="14" idx="1"/>
+          </p:cNvCxnSpPr>
+          <p:nvPr/>
+        </p:nvCxnSpPr>
+        <p:spPr>
+          <a:xfrm>
+            <a:off x="2190751" y="3285666"/>
+            <a:ext cx="892723" cy="0"/>
+          </a:xfrm>
+          <a:prstGeom prst="straightConnector1">
+            <a:avLst/>
+          </a:prstGeom>
+          <a:ln>
+            <a:solidFill>
+              <a:srgbClr val="1B0719"/>
+            </a:solidFill>
+            <a:tailEnd type="triangle"/>
+          </a:ln>
+        </p:spPr>
+        <p:style>
+          <a:lnRef idx="2">
+            <a:schemeClr val="accent1"/>
+          </a:lnRef>
+          <a:fillRef idx="0">
+            <a:schemeClr val="accent1"/>
+          </a:fillRef>
+          <a:effectRef idx="1">
+            <a:schemeClr val="accent1"/>
+          </a:effectRef>
+          <a:fontRef idx="minor">
+            <a:schemeClr val="tx1"/>
+          </a:fontRef>
+        </p:style>
+      </p:cxnSp>
+      <p:cxnSp>
+        <p:nvCxnSpPr>
+          <p:cNvPr id="52" name="Connector: Elbow 51">
+            <a:extLst>
+              <a:ext uri="{FF2B5EF4-FFF2-40B4-BE49-F238E27FC236}">
+                <a16:creationId xmlns:a16="http://schemas.microsoft.com/office/drawing/2014/main" id="{0286F538-60BB-6E98-9F46-07378BF05719}"/>
+              </a:ext>
+            </a:extLst>
+          </p:cNvPr>
+          <p:cNvCxnSpPr>
+            <a:cxnSpLocks/>
+            <a:endCxn id="9" idx="1"/>
+          </p:cNvCxnSpPr>
+          <p:nvPr/>
+        </p:nvCxnSpPr>
+        <p:spPr>
+          <a:xfrm>
+            <a:off x="5975350" y="1073146"/>
+            <a:ext cx="844827" cy="803156"/>
+          </a:xfrm>
+          <a:prstGeom prst="bentConnector3">
+            <a:avLst>
+              <a:gd name="adj1" fmla="val 110"/>
+            </a:avLst>
+          </a:prstGeom>
+          <a:ln>
+            <a:solidFill>
+              <a:srgbClr val="1B0719"/>
+            </a:solidFill>
+            <a:tailEnd type="triangle"/>
+          </a:ln>
+        </p:spPr>
+        <p:style>
+          <a:lnRef idx="2">
+            <a:schemeClr val="accent1"/>
+          </a:lnRef>
+          <a:fillRef idx="0">
+            <a:schemeClr val="accent1"/>
+          </a:fillRef>
+          <a:effectRef idx="1">
+            <a:schemeClr val="accent1"/>
+          </a:effectRef>
+          <a:fontRef idx="minor">
+            <a:schemeClr val="tx1"/>
+          </a:fontRef>
+        </p:style>
+      </p:cxnSp>
+      <p:cxnSp>
+        <p:nvCxnSpPr>
+          <p:cNvPr id="57" name="Connector: Elbow 56">
+            <a:extLst>
+              <a:ext uri="{FF2B5EF4-FFF2-40B4-BE49-F238E27FC236}">
+                <a16:creationId xmlns:a16="http://schemas.microsoft.com/office/drawing/2014/main" id="{ABBA598D-5C8C-EB68-198C-F9BFDD905D32}"/>
+              </a:ext>
+            </a:extLst>
+          </p:cNvPr>
+          <p:cNvCxnSpPr>
+            <a:cxnSpLocks/>
+            <a:endCxn id="15" idx="1"/>
+          </p:cNvCxnSpPr>
+          <p:nvPr/>
+        </p:nvCxnSpPr>
+        <p:spPr>
+          <a:xfrm rot="16200000" flipH="1">
+            <a:off x="5708036" y="2143614"/>
+            <a:ext cx="1379455" cy="844827"/>
+          </a:xfrm>
+          <a:prstGeom prst="bentConnector2">
+            <a:avLst/>
+          </a:prstGeom>
+          <a:ln>
+            <a:solidFill>
+              <a:srgbClr val="1B0719"/>
+            </a:solidFill>
+            <a:tailEnd type="triangle"/>
+          </a:ln>
+        </p:spPr>
+        <p:style>
+          <a:lnRef idx="2">
+            <a:schemeClr val="accent1"/>
+          </a:lnRef>
+          <a:fillRef idx="0">
+            <a:schemeClr val="accent1"/>
+          </a:fillRef>
+          <a:effectRef idx="1">
+            <a:schemeClr val="accent1"/>
+          </a:effectRef>
+          <a:fontRef idx="minor">
+            <a:schemeClr val="tx1"/>
+          </a:fontRef>
+        </p:style>
+      </p:cxnSp>
+      <p:cxnSp>
+        <p:nvCxnSpPr>
+          <p:cNvPr id="70" name="Connector: Elbow 69">
+            <a:extLst>
+              <a:ext uri="{FF2B5EF4-FFF2-40B4-BE49-F238E27FC236}">
+                <a16:creationId xmlns:a16="http://schemas.microsoft.com/office/drawing/2014/main" id="{0BC42A5C-6A17-95A1-25EF-C7EC9BFEC0C5}"/>
+              </a:ext>
+            </a:extLst>
+          </p:cNvPr>
+          <p:cNvCxnSpPr>
+            <a:cxnSpLocks/>
+            <a:endCxn id="20" idx="1"/>
+          </p:cNvCxnSpPr>
+          <p:nvPr/>
+        </p:nvCxnSpPr>
+        <p:spPr>
+          <a:xfrm>
+            <a:off x="7072313" y="2103690"/>
+            <a:ext cx="652465" cy="462339"/>
+          </a:xfrm>
+          <a:prstGeom prst="bentConnector3">
+            <a:avLst>
+              <a:gd name="adj1" fmla="val 4015"/>
+            </a:avLst>
+          </a:prstGeom>
+          <a:ln>
+            <a:solidFill>
+              <a:srgbClr val="1B0719"/>
+            </a:solidFill>
+            <a:tailEnd type="triangle"/>
+          </a:ln>
+        </p:spPr>
+        <p:style>
+          <a:lnRef idx="2">
+            <a:schemeClr val="accent1"/>
+          </a:lnRef>
+          <a:fillRef idx="0">
+            <a:schemeClr val="accent1"/>
+          </a:fillRef>
+          <a:effectRef idx="1">
+            <a:schemeClr val="accent1"/>
+          </a:effectRef>
+          <a:fontRef idx="minor">
+            <a:schemeClr val="tx1"/>
+          </a:fontRef>
+        </p:style>
+      </p:cxnSp>
+      <p:cxnSp>
+        <p:nvCxnSpPr>
+          <p:cNvPr id="74" name="Connector: Elbow 73">
+            <a:extLst>
+              <a:ext uri="{FF2B5EF4-FFF2-40B4-BE49-F238E27FC236}">
+                <a16:creationId xmlns:a16="http://schemas.microsoft.com/office/drawing/2014/main" id="{EE66B261-18AD-E247-81DA-37A1F8FA9A37}"/>
+              </a:ext>
+            </a:extLst>
+          </p:cNvPr>
+          <p:cNvCxnSpPr>
+            <a:cxnSpLocks/>
+            <a:endCxn id="16" idx="1"/>
+          </p:cNvCxnSpPr>
+          <p:nvPr/>
+        </p:nvCxnSpPr>
+        <p:spPr>
+          <a:xfrm>
+            <a:off x="7124700" y="3483144"/>
+            <a:ext cx="600078" cy="462339"/>
+          </a:xfrm>
+          <a:prstGeom prst="bentConnector3">
+            <a:avLst>
+              <a:gd name="adj1" fmla="val 794"/>
+            </a:avLst>
+          </a:prstGeom>
+          <a:ln>
+            <a:solidFill>
+              <a:srgbClr val="1B0719"/>
+            </a:solidFill>
+            <a:tailEnd type="triangle"/>
+          </a:ln>
+        </p:spPr>
+        <p:style>
+          <a:lnRef idx="2">
+            <a:schemeClr val="accent1"/>
+          </a:lnRef>
+          <a:fillRef idx="0">
+            <a:schemeClr val="accent1"/>
+          </a:fillRef>
+          <a:effectRef idx="1">
+            <a:schemeClr val="accent1"/>
+          </a:effectRef>
+          <a:fontRef idx="minor">
+            <a:schemeClr val="tx1"/>
+          </a:fontRef>
+        </p:style>
+      </p:cxnSp>
+      <p:cxnSp>
+        <p:nvCxnSpPr>
+          <p:cNvPr id="107" name="Straight Arrow Connector 106">
+            <a:extLst>
+              <a:ext uri="{FF2B5EF4-FFF2-40B4-BE49-F238E27FC236}">
+                <a16:creationId xmlns:a16="http://schemas.microsoft.com/office/drawing/2014/main" id="{EB05973E-C7C1-A1AE-87C5-3594E1F37745}"/>
+              </a:ext>
+            </a:extLst>
+          </p:cNvPr>
+          <p:cNvCxnSpPr>
+            <a:cxnSpLocks/>
+            <a:stCxn id="16" idx="2"/>
+            <a:endCxn id="17" idx="0"/>
+          </p:cNvCxnSpPr>
+          <p:nvPr/>
+        </p:nvCxnSpPr>
+        <p:spPr>
+          <a:xfrm>
+            <a:off x="8629379" y="4172871"/>
+            <a:ext cx="0" cy="234950"/>
+          </a:xfrm>
+          <a:prstGeom prst="straightConnector1">
+            <a:avLst/>
+          </a:prstGeom>
+          <a:ln>
+            <a:solidFill>
+              <a:srgbClr val="1B0719"/>
+            </a:solidFill>
+            <a:tailEnd type="triangle"/>
+          </a:ln>
+        </p:spPr>
+        <p:style>
+          <a:lnRef idx="2">
+            <a:schemeClr val="accent1"/>
+          </a:lnRef>
+          <a:fillRef idx="0">
+            <a:schemeClr val="accent1"/>
+          </a:fillRef>
+          <a:effectRef idx="1">
+            <a:schemeClr val="accent1"/>
+          </a:effectRef>
+          <a:fontRef idx="minor">
+            <a:schemeClr val="tx1"/>
+          </a:fontRef>
+        </p:style>
+      </p:cxnSp>
+      <p:cxnSp>
+        <p:nvCxnSpPr>
+          <p:cNvPr id="110" name="Straight Arrow Connector 109">
+            <a:extLst>
+              <a:ext uri="{FF2B5EF4-FFF2-40B4-BE49-F238E27FC236}">
+                <a16:creationId xmlns:a16="http://schemas.microsoft.com/office/drawing/2014/main" id="{069EE005-42E2-1AA0-F039-305D64999B6C}"/>
+              </a:ext>
+            </a:extLst>
+          </p:cNvPr>
+          <p:cNvCxnSpPr>
+            <a:cxnSpLocks/>
+          </p:cNvCxnSpPr>
+          <p:nvPr/>
+        </p:nvCxnSpPr>
+        <p:spPr>
+          <a:xfrm>
+            <a:off x="8629379" y="4862598"/>
+            <a:ext cx="0" cy="234950"/>
+          </a:xfrm>
+          <a:prstGeom prst="straightConnector1">
+            <a:avLst/>
+          </a:prstGeom>
+          <a:ln>
+            <a:solidFill>
+              <a:srgbClr val="1B0719"/>
+            </a:solidFill>
+            <a:tailEnd type="triangle"/>
+          </a:ln>
+        </p:spPr>
+        <p:style>
+          <a:lnRef idx="2">
+            <a:schemeClr val="accent1"/>
+          </a:lnRef>
+          <a:fillRef idx="0">
+            <a:schemeClr val="accent1"/>
+          </a:fillRef>
+          <a:effectRef idx="1">
+            <a:schemeClr val="accent1"/>
+          </a:effectRef>
+          <a:fontRef idx="minor">
+            <a:schemeClr val="tx1"/>
+          </a:fontRef>
+        </p:style>
+      </p:cxnSp>
+      <p:cxnSp>
+        <p:nvCxnSpPr>
+          <p:cNvPr id="111" name="Straight Arrow Connector 110">
+            <a:extLst>
+              <a:ext uri="{FF2B5EF4-FFF2-40B4-BE49-F238E27FC236}">
+                <a16:creationId xmlns:a16="http://schemas.microsoft.com/office/drawing/2014/main" id="{75309B45-B84B-B9B1-F77C-97F35D6D789D}"/>
+              </a:ext>
+            </a:extLst>
+          </p:cNvPr>
+          <p:cNvCxnSpPr>
+            <a:cxnSpLocks/>
+          </p:cNvCxnSpPr>
+          <p:nvPr/>
+        </p:nvCxnSpPr>
+        <p:spPr>
+          <a:xfrm>
+            <a:off x="8629379" y="5552325"/>
+            <a:ext cx="0" cy="234950"/>
+          </a:xfrm>
+          <a:prstGeom prst="straightConnector1">
+            <a:avLst/>
+          </a:prstGeom>
+          <a:ln>
+            <a:solidFill>
+              <a:srgbClr val="1B0719"/>
+            </a:solidFill>
+            <a:tailEnd type="triangle"/>
+          </a:ln>
+        </p:spPr>
+        <p:style>
+          <a:lnRef idx="2">
+            <a:schemeClr val="accent1"/>
+          </a:lnRef>
+          <a:fillRef idx="0">
+            <a:schemeClr val="accent1"/>
+          </a:fillRef>
+          <a:effectRef idx="1">
+            <a:schemeClr val="accent1"/>
+          </a:effectRef>
+          <a:fontRef idx="minor">
+            <a:schemeClr val="tx1"/>
+          </a:fontRef>
+        </p:style>
+      </p:cxnSp>
     </p:spTree>
     <p:extLst>
       <p:ext uri="{BB962C8B-B14F-4D97-AF65-F5344CB8AC3E}">
